--- a/AI漫剧制作课程/PPT课件/模块17-综合实战.pptx
+++ b/AI漫剧制作课程/PPT课件/模块17-综合实战.pptx
@@ -8852,7 +8852,7 @@
               </a:defRPr>
             </a:pPr>
             <a:r>
-              <a:t>🛠️  本模块实操任务</a:t>
+              <a:t>◆  本模块实操任务</a:t>
             </a:r>
           </a:p>
         </p:txBody>
@@ -12619,7 +12619,7 @@
               </a:defRPr>
             </a:pPr>
             <a:r>
-              <a:t>✓</a:t>
+              <a:t>◆</a:t>
             </a:r>
           </a:p>
         </p:txBody>
@@ -14700,7 +14700,7 @@
               </a:defRPr>
             </a:pPr>
             <a:r>
-              <a:t>📋  本节内容</a:t>
+              <a:t>§  本节内容</a:t>
             </a:r>
           </a:p>
         </p:txBody>
